--- a/make_presentation/templates/templates/creative/no_logo_10.pptx
+++ b/make_presentation/templates/templates/creative/no_logo_10.pptx
@@ -76,19 +76,7 @@
               <a:rPr b="0" lang="en-US" sz="4400" spc="-1" strike="noStrike">
                 <a:latin typeface="Arial"/>
               </a:rPr>
-              <a:t>Click to </a:t>
-            </a:r>
-            <a:r>
-              <a:rPr b="0" lang="en-US" sz="4400" spc="-1" strike="noStrike">
-                <a:latin typeface="Arial"/>
-              </a:rPr>
-              <a:t>move the </a:t>
-            </a:r>
-            <a:r>
-              <a:rPr b="0" lang="en-US" sz="4400" spc="-1" strike="noStrike">
-                <a:latin typeface="Arial"/>
-              </a:rPr>
-              <a:t>slide</a:t>
+              <a:t>Click to move the slide</a:t>
             </a:r>
             <a:endParaRPr b="0" lang="en-US" sz="4400" spc="-1" strike="noStrike">
               <a:latin typeface="Arial"/>
@@ -128,13 +116,7 @@
               <a:rPr b="0" lang="en-US" sz="2000" spc="-1" strike="noStrike">
                 <a:latin typeface="Arial"/>
               </a:rPr>
-              <a:t>Click to edit the </a:t>
-            </a:r>
-            <a:r>
-              <a:rPr b="0" lang="en-US" sz="2000" spc="-1" strike="noStrike">
-                <a:latin typeface="Arial"/>
-              </a:rPr>
-              <a:t>notes format</a:t>
+              <a:t>Click to edit the notes format</a:t>
             </a:r>
             <a:endParaRPr b="0" lang="en-US" sz="2000" spc="-1" strike="noStrike">
               <a:latin typeface="Arial"/>
@@ -319,7 +301,7 @@
             <a:pPr algn="r">
               <a:buNone/>
             </a:pPr>
-            <a:fld id="{18B21BF8-7C22-41D4-B981-942F05C82CD9}" type="slidenum">
+            <a:fld id="{9E34FC44-FBA4-4CCD-94BA-D11F5D0A6F77}" type="slidenum">
               <a:rPr b="0" lang="en-US" sz="1400" spc="-1" strike="noStrike">
                 <a:latin typeface="Times New Roman"/>
               </a:rPr>
@@ -367,7 +349,7 @@
         <p:spPr>
           <a:xfrm>
             <a:off x="685800" y="1143000"/>
-            <a:ext cx="5485680" cy="3085560"/>
+            <a:ext cx="5485320" cy="3085200"/>
           </a:xfrm>
           <a:prstGeom prst="rect">
             <a:avLst/>
@@ -390,7 +372,7 @@
         <p:spPr>
           <a:xfrm>
             <a:off x="685800" y="4400640"/>
-            <a:ext cx="5485680" cy="3599640"/>
+            <a:ext cx="5485320" cy="3599280"/>
           </a:xfrm>
           <a:prstGeom prst="rect">
             <a:avLst/>
@@ -424,7 +406,7 @@
         <p:spPr>
           <a:xfrm>
             <a:off x="3884760" y="8685360"/>
-            <a:ext cx="2971080" cy="457920"/>
+            <a:ext cx="2970720" cy="457560"/>
           </a:xfrm>
           <a:prstGeom prst="rect">
             <a:avLst/>
@@ -456,7 +438,7 @@
               </a:lnSpc>
               <a:buNone/>
             </a:pPr>
-            <a:fld id="{FB0BC679-8167-4514-8F2B-B1082BE5AEAD}" type="slidenum">
+            <a:fld id="{A6EA24D8-D637-49ED-B6C0-48F547DAB584}" type="slidenum">
               <a:rPr b="0" lang="ru-RU" sz="1200" spc="-1" strike="noStrike">
                 <a:latin typeface="Times New Roman"/>
               </a:rPr>
@@ -503,7 +485,7 @@
         <p:spPr>
           <a:xfrm>
             <a:off x="685800" y="1143000"/>
-            <a:ext cx="5485680" cy="3085560"/>
+            <a:ext cx="5485320" cy="3085200"/>
           </a:xfrm>
           <a:prstGeom prst="rect">
             <a:avLst/>
@@ -526,7 +508,7 @@
         <p:spPr>
           <a:xfrm>
             <a:off x="685800" y="4400640"/>
-            <a:ext cx="5485680" cy="3599640"/>
+            <a:ext cx="5485320" cy="3599280"/>
           </a:xfrm>
           <a:prstGeom prst="rect">
             <a:avLst/>
@@ -560,7 +542,7 @@
         <p:spPr>
           <a:xfrm>
             <a:off x="3884760" y="8685360"/>
-            <a:ext cx="2971080" cy="457920"/>
+            <a:ext cx="2970720" cy="457560"/>
           </a:xfrm>
           <a:prstGeom prst="rect">
             <a:avLst/>
@@ -592,7 +574,7 @@
               </a:lnSpc>
               <a:buNone/>
             </a:pPr>
-            <a:fld id="{2793FB26-49E8-4F42-A79F-F1BD7A8CEE87}" type="slidenum">
+            <a:fld id="{AEB35866-603C-4B5D-9704-D0F7C8B1EE9C}" type="slidenum">
               <a:rPr b="0" lang="ru-RU" sz="1200" spc="-1" strike="noStrike">
                 <a:latin typeface="Times New Roman"/>
               </a:rPr>
@@ -639,7 +621,7 @@
         <p:spPr>
           <a:xfrm>
             <a:off x="685800" y="1143000"/>
-            <a:ext cx="5485680" cy="3085560"/>
+            <a:ext cx="5485320" cy="3085200"/>
           </a:xfrm>
           <a:prstGeom prst="rect">
             <a:avLst/>
@@ -662,7 +644,7 @@
         <p:spPr>
           <a:xfrm>
             <a:off x="685800" y="4400640"/>
-            <a:ext cx="5485680" cy="3599640"/>
+            <a:ext cx="5485320" cy="3599280"/>
           </a:xfrm>
           <a:prstGeom prst="rect">
             <a:avLst/>
@@ -696,7 +678,7 @@
         <p:spPr>
           <a:xfrm>
             <a:off x="3884760" y="8685360"/>
-            <a:ext cx="2971080" cy="457920"/>
+            <a:ext cx="2970720" cy="457560"/>
           </a:xfrm>
           <a:prstGeom prst="rect">
             <a:avLst/>
@@ -728,7 +710,7 @@
               </a:lnSpc>
               <a:buNone/>
             </a:pPr>
-            <a:fld id="{07F472E7-1C15-4BE3-A827-9F06899E3385}" type="slidenum">
+            <a:fld id="{1871489E-7B27-469D-9D6C-C04AE5783E3D}" type="slidenum">
               <a:rPr b="0" lang="ru-RU" sz="1200" spc="-1" strike="noStrike">
                 <a:latin typeface="Times New Roman"/>
               </a:rPr>
@@ -796,7 +778,7 @@
         <p:txBody>
           <a:bodyPr/>
           <a:p>
-            <a:fld id="{82DADA35-F71E-4486-9C65-C0BADDEAA615}" type="slidenum">
+            <a:fld id="{D3F2906F-EE72-4216-916C-A87E3F7010E6}" type="slidenum">
               <a:t>&lt;#&gt;</a:t>
             </a:fld>
           </a:p>
@@ -858,7 +840,7 @@
         <p:spPr>
           <a:xfrm>
             <a:off x="1143000" y="841680"/>
-            <a:ext cx="6857280" cy="1789920"/>
+            <a:ext cx="6856920" cy="1789560"/>
           </a:xfrm>
           <a:prstGeom prst="rect">
             <a:avLst/>
@@ -895,7 +877,7 @@
         <p:spPr>
           <a:xfrm>
             <a:off x="457200" y="1203480"/>
-            <a:ext cx="8229240" cy="1422720"/>
+            <a:ext cx="8228880" cy="1422360"/>
           </a:xfrm>
           <a:prstGeom prst="rect">
             <a:avLst/>
@@ -928,8 +910,8 @@
         </p:nvSpPr>
         <p:spPr>
           <a:xfrm>
-            <a:off x="457200" y="2761920"/>
-            <a:ext cx="8229240" cy="1422720"/>
+            <a:off x="457200" y="2761200"/>
+            <a:ext cx="8228880" cy="1422360"/>
           </a:xfrm>
           <a:prstGeom prst="rect">
             <a:avLst/>
@@ -984,7 +966,7 @@
         <p:txBody>
           <a:bodyPr/>
           <a:p>
-            <a:fld id="{85A7CF37-CC0E-4C81-8927-AFDF1EC1D1C6}" type="slidenum">
+            <a:fld id="{6C8E8B94-2BCC-4433-9688-C7231E9B7F74}" type="slidenum">
               <a:t>&lt;#&gt;</a:t>
             </a:fld>
           </a:p>
@@ -1046,7 +1028,7 @@
         <p:spPr>
           <a:xfrm>
             <a:off x="1143000" y="841680"/>
-            <a:ext cx="6857280" cy="1789920"/>
+            <a:ext cx="6856920" cy="1789560"/>
           </a:xfrm>
           <a:prstGeom prst="rect">
             <a:avLst/>
@@ -1083,7 +1065,7 @@
         <p:spPr>
           <a:xfrm>
             <a:off x="457200" y="1203480"/>
-            <a:ext cx="4015800" cy="1422720"/>
+            <a:ext cx="4015440" cy="1422360"/>
           </a:xfrm>
           <a:prstGeom prst="rect">
             <a:avLst/>
@@ -1116,8 +1098,8 @@
         </p:nvSpPr>
         <p:spPr>
           <a:xfrm>
-            <a:off x="4674240" y="1203480"/>
-            <a:ext cx="4015800" cy="1422720"/>
+            <a:off x="4673880" y="1203480"/>
+            <a:ext cx="4015440" cy="1422360"/>
           </a:xfrm>
           <a:prstGeom prst="rect">
             <a:avLst/>
@@ -1150,8 +1132,8 @@
         </p:nvSpPr>
         <p:spPr>
           <a:xfrm>
-            <a:off x="457200" y="2761920"/>
-            <a:ext cx="4015800" cy="1422720"/>
+            <a:off x="457200" y="2761200"/>
+            <a:ext cx="4015440" cy="1422360"/>
           </a:xfrm>
           <a:prstGeom prst="rect">
             <a:avLst/>
@@ -1184,8 +1166,8 @@
         </p:nvSpPr>
         <p:spPr>
           <a:xfrm>
-            <a:off x="4674240" y="2761920"/>
-            <a:ext cx="4015800" cy="1422720"/>
+            <a:off x="4673880" y="2761200"/>
+            <a:ext cx="4015440" cy="1422360"/>
           </a:xfrm>
           <a:prstGeom prst="rect">
             <a:avLst/>
@@ -1240,7 +1222,7 @@
         <p:txBody>
           <a:bodyPr/>
           <a:p>
-            <a:fld id="{BD19DD05-A4ED-43B9-98CA-657BCBE35FFC}" type="slidenum">
+            <a:fld id="{7A86A0A8-1C3F-48E7-834B-B9B36ACCB8B8}" type="slidenum">
               <a:t>&lt;#&gt;</a:t>
             </a:fld>
           </a:p>
@@ -1302,7 +1284,7 @@
         <p:spPr>
           <a:xfrm>
             <a:off x="1143000" y="841680"/>
-            <a:ext cx="6857280" cy="1789920"/>
+            <a:ext cx="6856920" cy="1789560"/>
           </a:xfrm>
           <a:prstGeom prst="rect">
             <a:avLst/>
@@ -1339,7 +1321,7 @@
         <p:spPr>
           <a:xfrm>
             <a:off x="457200" y="1203480"/>
-            <a:ext cx="2649600" cy="1422720"/>
+            <a:ext cx="2649600" cy="1422360"/>
           </a:xfrm>
           <a:prstGeom prst="rect">
             <a:avLst/>
@@ -1373,7 +1355,7 @@
         <p:spPr>
           <a:xfrm>
             <a:off x="3239640" y="1203480"/>
-            <a:ext cx="2649600" cy="1422720"/>
+            <a:ext cx="2649600" cy="1422360"/>
           </a:xfrm>
           <a:prstGeom prst="rect">
             <a:avLst/>
@@ -1407,7 +1389,7 @@
         <p:spPr>
           <a:xfrm>
             <a:off x="6022080" y="1203480"/>
-            <a:ext cx="2649600" cy="1422720"/>
+            <a:ext cx="2649600" cy="1422360"/>
           </a:xfrm>
           <a:prstGeom prst="rect">
             <a:avLst/>
@@ -1440,8 +1422,8 @@
         </p:nvSpPr>
         <p:spPr>
           <a:xfrm>
-            <a:off x="457200" y="2761920"/>
-            <a:ext cx="2649600" cy="1422720"/>
+            <a:off x="457200" y="2761200"/>
+            <a:ext cx="2649600" cy="1422360"/>
           </a:xfrm>
           <a:prstGeom prst="rect">
             <a:avLst/>
@@ -1474,8 +1456,8 @@
         </p:nvSpPr>
         <p:spPr>
           <a:xfrm>
-            <a:off x="3239640" y="2761920"/>
-            <a:ext cx="2649600" cy="1422720"/>
+            <a:off x="3239640" y="2761200"/>
+            <a:ext cx="2649600" cy="1422360"/>
           </a:xfrm>
           <a:prstGeom prst="rect">
             <a:avLst/>
@@ -1508,8 +1490,8 @@
         </p:nvSpPr>
         <p:spPr>
           <a:xfrm>
-            <a:off x="6022080" y="2761920"/>
-            <a:ext cx="2649600" cy="1422720"/>
+            <a:off x="6022080" y="2761200"/>
+            <a:ext cx="2649600" cy="1422360"/>
           </a:xfrm>
           <a:prstGeom prst="rect">
             <a:avLst/>
@@ -1564,7 +1546,7 @@
         <p:txBody>
           <a:bodyPr/>
           <a:p>
-            <a:fld id="{83CFA919-31B4-4952-89C3-D764EA7DC703}" type="slidenum">
+            <a:fld id="{0C498F8B-555D-4A07-A01F-E539210584E2}" type="slidenum">
               <a:t>&lt;#&gt;</a:t>
             </a:fld>
           </a:p>
@@ -1626,7 +1608,7 @@
         <p:spPr>
           <a:xfrm>
             <a:off x="1143000" y="841680"/>
-            <a:ext cx="6857280" cy="1789920"/>
+            <a:ext cx="6856920" cy="1789560"/>
           </a:xfrm>
           <a:prstGeom prst="rect">
             <a:avLst/>
@@ -1663,7 +1645,7 @@
         <p:spPr>
           <a:xfrm>
             <a:off x="457200" y="1203480"/>
-            <a:ext cx="8229240" cy="2982960"/>
+            <a:ext cx="8228880" cy="2982600"/>
           </a:xfrm>
           <a:prstGeom prst="rect">
             <a:avLst/>
@@ -1721,7 +1703,7 @@
         <p:txBody>
           <a:bodyPr/>
           <a:p>
-            <a:fld id="{A4DC04D6-2477-4188-9ED9-6281410D26F3}" type="slidenum">
+            <a:fld id="{02791803-0A54-4042-A19A-819131036861}" type="slidenum">
               <a:t>&lt;#&gt;</a:t>
             </a:fld>
           </a:p>
@@ -1783,7 +1765,7 @@
         <p:spPr>
           <a:xfrm>
             <a:off x="1143000" y="841680"/>
-            <a:ext cx="6857280" cy="1789920"/>
+            <a:ext cx="6856920" cy="1789560"/>
           </a:xfrm>
           <a:prstGeom prst="rect">
             <a:avLst/>
@@ -1820,7 +1802,7 @@
         <p:spPr>
           <a:xfrm>
             <a:off x="457200" y="1203480"/>
-            <a:ext cx="8229240" cy="2982960"/>
+            <a:ext cx="8228880" cy="2982600"/>
           </a:xfrm>
           <a:prstGeom prst="rect">
             <a:avLst/>
@@ -1875,7 +1857,7 @@
         <p:txBody>
           <a:bodyPr/>
           <a:p>
-            <a:fld id="{E855B7E1-ED3E-4523-9549-E14F08E9AE62}" type="slidenum">
+            <a:fld id="{5F1E6216-839A-4CDA-9233-19439F8EB026}" type="slidenum">
               <a:t>&lt;#&gt;</a:t>
             </a:fld>
           </a:p>
@@ -1937,7 +1919,7 @@
         <p:spPr>
           <a:xfrm>
             <a:off x="1143000" y="841680"/>
-            <a:ext cx="6857280" cy="1789920"/>
+            <a:ext cx="6856920" cy="1789560"/>
           </a:xfrm>
           <a:prstGeom prst="rect">
             <a:avLst/>
@@ -1974,7 +1956,7 @@
         <p:spPr>
           <a:xfrm>
             <a:off x="457200" y="1203480"/>
-            <a:ext cx="4015800" cy="2982960"/>
+            <a:ext cx="4015440" cy="2982600"/>
           </a:xfrm>
           <a:prstGeom prst="rect">
             <a:avLst/>
@@ -2007,8 +1989,8 @@
         </p:nvSpPr>
         <p:spPr>
           <a:xfrm>
-            <a:off x="4674240" y="1203480"/>
-            <a:ext cx="4015800" cy="2982960"/>
+            <a:off x="4673880" y="1203480"/>
+            <a:ext cx="4015440" cy="2982600"/>
           </a:xfrm>
           <a:prstGeom prst="rect">
             <a:avLst/>
@@ -2063,7 +2045,7 @@
         <p:txBody>
           <a:bodyPr/>
           <a:p>
-            <a:fld id="{72155603-DD96-410D-AFCD-7ACC5D6405E0}" type="slidenum">
+            <a:fld id="{5B28B4B4-F774-4725-B99A-C5E907D4ED9C}" type="slidenum">
               <a:t>&lt;#&gt;</a:t>
             </a:fld>
           </a:p>
@@ -2125,7 +2107,7 @@
         <p:spPr>
           <a:xfrm>
             <a:off x="1143000" y="841680"/>
-            <a:ext cx="6857280" cy="1789920"/>
+            <a:ext cx="6856920" cy="1789560"/>
           </a:xfrm>
           <a:prstGeom prst="rect">
             <a:avLst/>
@@ -2183,7 +2165,7 @@
         <p:txBody>
           <a:bodyPr/>
           <a:p>
-            <a:fld id="{87916EB4-03CC-4461-B8F5-ACD3BC12A29F}" type="slidenum">
+            <a:fld id="{4631AA37-C26B-47DE-8396-1B49A7FD0F7C}" type="slidenum">
               <a:t>&lt;#&gt;</a:t>
             </a:fld>
           </a:p>
@@ -2245,7 +2227,7 @@
         <p:spPr>
           <a:xfrm>
             <a:off x="1143000" y="841680"/>
-            <a:ext cx="6857280" cy="8298360"/>
+            <a:ext cx="6856920" cy="8296560"/>
           </a:xfrm>
           <a:prstGeom prst="rect">
             <a:avLst/>
@@ -2303,7 +2285,7 @@
         <p:txBody>
           <a:bodyPr/>
           <a:p>
-            <a:fld id="{9DBB780A-C929-4E50-A2B7-0AFE61F2374F}" type="slidenum">
+            <a:fld id="{CEF6EB1E-58BA-4594-9940-9D849F68A47C}" type="slidenum">
               <a:t>&lt;#&gt;</a:t>
             </a:fld>
           </a:p>
@@ -2365,7 +2347,7 @@
         <p:spPr>
           <a:xfrm>
             <a:off x="1143000" y="841680"/>
-            <a:ext cx="6857280" cy="1789920"/>
+            <a:ext cx="6856920" cy="1789560"/>
           </a:xfrm>
           <a:prstGeom prst="rect">
             <a:avLst/>
@@ -2402,7 +2384,7 @@
         <p:spPr>
           <a:xfrm>
             <a:off x="457200" y="1203480"/>
-            <a:ext cx="4015800" cy="1422720"/>
+            <a:ext cx="4015440" cy="1422360"/>
           </a:xfrm>
           <a:prstGeom prst="rect">
             <a:avLst/>
@@ -2435,8 +2417,8 @@
         </p:nvSpPr>
         <p:spPr>
           <a:xfrm>
-            <a:off x="4674240" y="1203480"/>
-            <a:ext cx="4015800" cy="2982960"/>
+            <a:off x="4673880" y="1203480"/>
+            <a:ext cx="4015440" cy="2982600"/>
           </a:xfrm>
           <a:prstGeom prst="rect">
             <a:avLst/>
@@ -2469,8 +2451,8 @@
         </p:nvSpPr>
         <p:spPr>
           <a:xfrm>
-            <a:off x="457200" y="2761920"/>
-            <a:ext cx="4015800" cy="1422720"/>
+            <a:off x="457200" y="2761200"/>
+            <a:ext cx="4015440" cy="1422360"/>
           </a:xfrm>
           <a:prstGeom prst="rect">
             <a:avLst/>
@@ -2525,7 +2507,7 @@
         <p:txBody>
           <a:bodyPr/>
           <a:p>
-            <a:fld id="{E46FC325-E7B6-42D7-8189-697404DEDB9A}" type="slidenum">
+            <a:fld id="{85FC1E71-7DEE-4369-BE6C-DDD1FD1F9CBE}" type="slidenum">
               <a:t>&lt;#&gt;</a:t>
             </a:fld>
           </a:p>
@@ -2587,7 +2569,7 @@
         <p:spPr>
           <a:xfrm>
             <a:off x="1143000" y="841680"/>
-            <a:ext cx="6857280" cy="1789920"/>
+            <a:ext cx="6856920" cy="1789560"/>
           </a:xfrm>
           <a:prstGeom prst="rect">
             <a:avLst/>
@@ -2624,7 +2606,7 @@
         <p:spPr>
           <a:xfrm>
             <a:off x="457200" y="1203480"/>
-            <a:ext cx="4015800" cy="2982960"/>
+            <a:ext cx="4015440" cy="2982600"/>
           </a:xfrm>
           <a:prstGeom prst="rect">
             <a:avLst/>
@@ -2657,8 +2639,8 @@
         </p:nvSpPr>
         <p:spPr>
           <a:xfrm>
-            <a:off x="4674240" y="1203480"/>
-            <a:ext cx="4015800" cy="1422720"/>
+            <a:off x="4673880" y="1203480"/>
+            <a:ext cx="4015440" cy="1422360"/>
           </a:xfrm>
           <a:prstGeom prst="rect">
             <a:avLst/>
@@ -2691,8 +2673,8 @@
         </p:nvSpPr>
         <p:spPr>
           <a:xfrm>
-            <a:off x="4674240" y="2761920"/>
-            <a:ext cx="4015800" cy="1422720"/>
+            <a:off x="4673880" y="2761200"/>
+            <a:ext cx="4015440" cy="1422360"/>
           </a:xfrm>
           <a:prstGeom prst="rect">
             <a:avLst/>
@@ -2747,7 +2729,7 @@
         <p:txBody>
           <a:bodyPr/>
           <a:p>
-            <a:fld id="{CD01799B-8B6E-45D9-A2EA-B6BFEC529AE6}" type="slidenum">
+            <a:fld id="{B623B89D-869C-4EBC-A03E-B53CDA64D196}" type="slidenum">
               <a:t>&lt;#&gt;</a:t>
             </a:fld>
           </a:p>
@@ -2809,7 +2791,7 @@
         <p:spPr>
           <a:xfrm>
             <a:off x="1143000" y="841680"/>
-            <a:ext cx="6857280" cy="1789920"/>
+            <a:ext cx="6856920" cy="1789560"/>
           </a:xfrm>
           <a:prstGeom prst="rect">
             <a:avLst/>
@@ -2846,7 +2828,7 @@
         <p:spPr>
           <a:xfrm>
             <a:off x="457200" y="1203480"/>
-            <a:ext cx="4015800" cy="1422720"/>
+            <a:ext cx="4015440" cy="1422360"/>
           </a:xfrm>
           <a:prstGeom prst="rect">
             <a:avLst/>
@@ -2879,8 +2861,8 @@
         </p:nvSpPr>
         <p:spPr>
           <a:xfrm>
-            <a:off x="4674240" y="1203480"/>
-            <a:ext cx="4015800" cy="1422720"/>
+            <a:off x="4673880" y="1203480"/>
+            <a:ext cx="4015440" cy="1422360"/>
           </a:xfrm>
           <a:prstGeom prst="rect">
             <a:avLst/>
@@ -2913,8 +2895,8 @@
         </p:nvSpPr>
         <p:spPr>
           <a:xfrm>
-            <a:off x="457200" y="2761920"/>
-            <a:ext cx="8229240" cy="1422720"/>
+            <a:off x="457200" y="2761200"/>
+            <a:ext cx="8228880" cy="1422360"/>
           </a:xfrm>
           <a:prstGeom prst="rect">
             <a:avLst/>
@@ -2969,7 +2951,7 @@
         <p:txBody>
           <a:bodyPr/>
           <a:p>
-            <a:fld id="{B08DD0AB-8023-40DD-9222-B57DF0B182D9}" type="slidenum">
+            <a:fld id="{458EC8C9-A969-48EE-9FC7-2D7777570E12}" type="slidenum">
               <a:t>&lt;#&gt;</a:t>
             </a:fld>
           </a:p>
@@ -3038,7 +3020,7 @@
         <p:spPr>
           <a:xfrm>
             <a:off x="1143000" y="841680"/>
-            <a:ext cx="6857280" cy="1789920"/>
+            <a:ext cx="6856920" cy="1789560"/>
           </a:xfrm>
           <a:prstGeom prst="rect">
             <a:avLst/>
@@ -3057,85 +3039,7 @@
               <a:rPr b="0" lang="en-US" sz="1800" spc="-1" strike="noStrike">
                 <a:latin typeface="Arial"/>
               </a:rPr>
-              <a:t>Cli</a:t>
-            </a:r>
-            <a:r>
-              <a:rPr b="0" lang="en-US" sz="1800" spc="-1" strike="noStrike">
-                <a:latin typeface="Arial"/>
-              </a:rPr>
-              <a:t>ck </a:t>
-            </a:r>
-            <a:r>
-              <a:rPr b="0" lang="en-US" sz="1800" spc="-1" strike="noStrike">
-                <a:latin typeface="Arial"/>
-              </a:rPr>
-              <a:t>to </a:t>
-            </a:r>
-            <a:r>
-              <a:rPr b="0" lang="en-US" sz="1800" spc="-1" strike="noStrike">
-                <a:latin typeface="Arial"/>
-              </a:rPr>
-              <a:t>edi</a:t>
-            </a:r>
-            <a:r>
-              <a:rPr b="0" lang="en-US" sz="1800" spc="-1" strike="noStrike">
-                <a:latin typeface="Arial"/>
-              </a:rPr>
-              <a:t>t </a:t>
-            </a:r>
-            <a:r>
-              <a:rPr b="0" lang="en-US" sz="1800" spc="-1" strike="noStrike">
-                <a:latin typeface="Arial"/>
-              </a:rPr>
-              <a:t>th</a:t>
-            </a:r>
-            <a:r>
-              <a:rPr b="0" lang="en-US" sz="1800" spc="-1" strike="noStrike">
-                <a:latin typeface="Arial"/>
-              </a:rPr>
-              <a:t>e </a:t>
-            </a:r>
-            <a:r>
-              <a:rPr b="0" lang="en-US" sz="1800" spc="-1" strike="noStrike">
-                <a:latin typeface="Arial"/>
-              </a:rPr>
-              <a:t>titl</a:t>
-            </a:r>
-            <a:r>
-              <a:rPr b="0" lang="en-US" sz="1800" spc="-1" strike="noStrike">
-                <a:latin typeface="Arial"/>
-              </a:rPr>
-              <a:t>e </a:t>
-            </a:r>
-            <a:r>
-              <a:rPr b="0" lang="en-US" sz="1800" spc="-1" strike="noStrike">
-                <a:latin typeface="Arial"/>
-              </a:rPr>
-              <a:t>tex</a:t>
-            </a:r>
-            <a:r>
-              <a:rPr b="0" lang="en-US" sz="1800" spc="-1" strike="noStrike">
-                <a:latin typeface="Arial"/>
-              </a:rPr>
-              <a:t>t </a:t>
-            </a:r>
-            <a:r>
-              <a:rPr b="0" lang="en-US" sz="1800" spc="-1" strike="noStrike">
-                <a:latin typeface="Arial"/>
-              </a:rPr>
-              <a:t>for</a:t>
-            </a:r>
-            <a:r>
-              <a:rPr b="0" lang="en-US" sz="1800" spc="-1" strike="noStrike">
-                <a:latin typeface="Arial"/>
-              </a:rPr>
-              <a:t>m</a:t>
-            </a:r>
-            <a:r>
-              <a:rPr b="0" lang="en-US" sz="1800" spc="-1" strike="noStrike">
-                <a:latin typeface="Arial"/>
-              </a:rPr>
-              <a:t>at</a:t>
+              <a:t>Click to edit the title text format</a:t>
             </a:r>
             <a:endParaRPr b="0" lang="en-US" sz="1800" spc="-1" strike="noStrike">
               <a:latin typeface="Arial"/>
@@ -3146,173 +3050,6 @@
       <p:sp>
         <p:nvSpPr>
           <p:cNvPr id="1" name="PlaceHolder 2"/>
-          <p:cNvSpPr>
-            <a:spLocks noGrp="1"/>
-          </p:cNvSpPr>
-          <p:nvPr>
-            <p:ph type="ftr" idx="1"/>
-          </p:nvPr>
-        </p:nvSpPr>
-        <p:spPr>
-          <a:xfrm>
-            <a:off x="3029040" y="4767120"/>
-            <a:ext cx="3085560" cy="273240"/>
-          </a:xfrm>
-          <a:prstGeom prst="rect">
-            <a:avLst/>
-          </a:prstGeom>
-          <a:noFill/>
-          <a:ln w="0">
-            <a:noFill/>
-          </a:ln>
-        </p:spPr>
-        <p:txBody>
-          <a:bodyPr lIns="90000" rIns="90000" tIns="45000" bIns="45000" anchor="ctr">
-            <a:noAutofit/>
-          </a:bodyPr>
-          <a:lstStyle>
-            <a:lvl1pPr algn="ctr">
-              <a:lnSpc>
-                <a:spcPct val="100000"/>
-              </a:lnSpc>
-              <a:buNone/>
-              <a:defRPr b="0" lang="en-US" sz="1400" spc="-1" strike="noStrike">
-                <a:latin typeface="Times New Roman"/>
-              </a:defRPr>
-            </a:lvl1pPr>
-          </a:lstStyle>
-          <a:p>
-            <a:pPr algn="ctr">
-              <a:lnSpc>
-                <a:spcPct val="100000"/>
-              </a:lnSpc>
-              <a:buNone/>
-            </a:pPr>
-            <a:r>
-              <a:rPr b="0" lang="en-US" sz="1400" spc="-1" strike="noStrike">
-                <a:latin typeface="Times New Roman"/>
-              </a:rPr>
-              <a:t>&lt;footer&gt;</a:t>
-            </a:r>
-            <a:endParaRPr b="0" lang="en-US" sz="1400" spc="-1" strike="noStrike">
-              <a:latin typeface="Times New Roman"/>
-            </a:endParaRPr>
-          </a:p>
-        </p:txBody>
-      </p:sp>
-      <p:sp>
-        <p:nvSpPr>
-          <p:cNvPr id="2" name="PlaceHolder 3"/>
-          <p:cNvSpPr>
-            <a:spLocks noGrp="1"/>
-          </p:cNvSpPr>
-          <p:nvPr>
-            <p:ph type="sldNum" idx="2"/>
-          </p:nvPr>
-        </p:nvSpPr>
-        <p:spPr>
-          <a:xfrm>
-            <a:off x="6458040" y="4767120"/>
-            <a:ext cx="2056680" cy="273240"/>
-          </a:xfrm>
-          <a:prstGeom prst="rect">
-            <a:avLst/>
-          </a:prstGeom>
-          <a:noFill/>
-          <a:ln w="0">
-            <a:noFill/>
-          </a:ln>
-        </p:spPr>
-        <p:txBody>
-          <a:bodyPr lIns="90000" rIns="90000" tIns="45000" bIns="45000" anchor="ctr">
-            <a:noAutofit/>
-          </a:bodyPr>
-          <a:lstStyle>
-            <a:lvl1pPr algn="r">
-              <a:lnSpc>
-                <a:spcPct val="100000"/>
-              </a:lnSpc>
-              <a:buNone/>
-              <a:defRPr b="0" lang="en-US" sz="900" spc="-1" strike="noStrike">
-                <a:solidFill>
-                  <a:srgbClr val="8b8b8b"/>
-                </a:solidFill>
-                <a:latin typeface="Calibri"/>
-              </a:defRPr>
-            </a:lvl1pPr>
-          </a:lstStyle>
-          <a:p>
-            <a:pPr algn="r">
-              <a:lnSpc>
-                <a:spcPct val="100000"/>
-              </a:lnSpc>
-              <a:buNone/>
-            </a:pPr>
-            <a:fld id="{18805EF7-765E-4A8D-A959-BCDA090FFE97}" type="slidenum">
-              <a:rPr b="0" lang="en-US" sz="900" spc="-1" strike="noStrike">
-                <a:solidFill>
-                  <a:srgbClr val="8b8b8b"/>
-                </a:solidFill>
-                <a:latin typeface="Calibri"/>
-              </a:rPr>
-              <a:t>&lt;number&gt;</a:t>
-            </a:fld>
-            <a:endParaRPr b="0" lang="en-US" sz="900" spc="-1" strike="noStrike">
-              <a:latin typeface="Times New Roman"/>
-            </a:endParaRPr>
-          </a:p>
-        </p:txBody>
-      </p:sp>
-      <p:sp>
-        <p:nvSpPr>
-          <p:cNvPr id="3" name="PlaceHolder 4"/>
-          <p:cNvSpPr>
-            <a:spLocks noGrp="1"/>
-          </p:cNvSpPr>
-          <p:nvPr>
-            <p:ph type="dt" idx="3"/>
-          </p:nvPr>
-        </p:nvSpPr>
-        <p:spPr>
-          <a:xfrm>
-            <a:off x="628560" y="4767120"/>
-            <a:ext cx="2056680" cy="273240"/>
-          </a:xfrm>
-          <a:prstGeom prst="rect">
-            <a:avLst/>
-          </a:prstGeom>
-          <a:noFill/>
-          <a:ln w="0">
-            <a:noFill/>
-          </a:ln>
-        </p:spPr>
-        <p:txBody>
-          <a:bodyPr lIns="90000" rIns="90000" tIns="45000" bIns="45000" anchor="ctr">
-            <a:noAutofit/>
-          </a:bodyPr>
-          <a:lstStyle>
-            <a:lvl1pPr>
-              <a:defRPr b="0" lang="en-US" sz="1400" spc="-1" strike="noStrike">
-                <a:latin typeface="Times New Roman"/>
-              </a:defRPr>
-            </a:lvl1pPr>
-          </a:lstStyle>
-          <a:p>
-            <a:r>
-              <a:rPr b="0" lang="en-US" sz="1400" spc="-1" strike="noStrike">
-                <a:latin typeface="Times New Roman"/>
-              </a:rPr>
-              <a:t>&lt;date/time&gt;</a:t>
-            </a:r>
-            <a:endParaRPr b="0" lang="en-US" sz="1400" spc="-1" strike="noStrike">
-              <a:latin typeface="Times New Roman"/>
-            </a:endParaRPr>
-          </a:p>
-        </p:txBody>
-      </p:sp>
-      <p:sp>
-        <p:nvSpPr>
-          <p:cNvPr id="4" name="PlaceHolder 5"/>
           <p:cNvSpPr>
             <a:spLocks noGrp="1"/>
           </p:cNvSpPr>
@@ -3323,7 +3060,7 @@
         <p:spPr>
           <a:xfrm>
             <a:off x="457200" y="1203480"/>
-            <a:ext cx="8229240" cy="2982960"/>
+            <a:ext cx="8228880" cy="2982600"/>
           </a:xfrm>
           <a:prstGeom prst="rect">
             <a:avLst/>
@@ -3350,12 +3087,12 @@
               <a:buChar char=""/>
             </a:pPr>
             <a:r>
-              <a:rPr b="0" lang="en-US" sz="3200" spc="-1" strike="noStrike">
+              <a:rPr b="0" lang="en-US" sz="1800" spc="-1" strike="noStrike">
                 <a:latin typeface="Arial"/>
               </a:rPr>
               <a:t>Click to edit the outline text format</a:t>
             </a:r>
-            <a:endParaRPr b="0" lang="en-US" sz="3200" spc="-1" strike="noStrike">
+            <a:endParaRPr b="0" lang="en-US" sz="1800" spc="-1" strike="noStrike">
               <a:latin typeface="Arial"/>
             </a:endParaRPr>
           </a:p>
@@ -3372,12 +3109,12 @@
               <a:buChar char=""/>
             </a:pPr>
             <a:r>
-              <a:rPr b="0" lang="en-US" sz="2800" spc="-1" strike="noStrike">
+              <a:rPr b="0" lang="en-US" sz="1800" spc="-1" strike="noStrike">
                 <a:latin typeface="Arial"/>
               </a:rPr>
               <a:t>Second Outline Level</a:t>
             </a:r>
-            <a:endParaRPr b="0" lang="en-US" sz="2800" spc="-1" strike="noStrike">
+            <a:endParaRPr b="0" lang="en-US" sz="1800" spc="-1" strike="noStrike">
               <a:latin typeface="Arial"/>
             </a:endParaRPr>
           </a:p>
@@ -3394,12 +3131,12 @@
               <a:buChar char=""/>
             </a:pPr>
             <a:r>
-              <a:rPr b="0" lang="en-US" sz="2400" spc="-1" strike="noStrike">
+              <a:rPr b="0" lang="en-US" sz="1800" spc="-1" strike="noStrike">
                 <a:latin typeface="Arial"/>
               </a:rPr>
               <a:t>Third Outline Level</a:t>
             </a:r>
-            <a:endParaRPr b="0" lang="en-US" sz="2400" spc="-1" strike="noStrike">
+            <a:endParaRPr b="0" lang="en-US" sz="1800" spc="-1" strike="noStrike">
               <a:latin typeface="Arial"/>
             </a:endParaRPr>
           </a:p>
@@ -3416,12 +3153,12 @@
               <a:buChar char=""/>
             </a:pPr>
             <a:r>
-              <a:rPr b="0" lang="en-US" sz="2000" spc="-1" strike="noStrike">
+              <a:rPr b="0" lang="en-US" sz="1800" spc="-1" strike="noStrike">
                 <a:latin typeface="Arial"/>
               </a:rPr>
               <a:t>Fourth Outline Level</a:t>
             </a:r>
-            <a:endParaRPr b="0" lang="en-US" sz="2000" spc="-1" strike="noStrike">
+            <a:endParaRPr b="0" lang="en-US" sz="1800" spc="-1" strike="noStrike">
               <a:latin typeface="Arial"/>
             </a:endParaRPr>
           </a:p>
@@ -3438,12 +3175,12 @@
               <a:buChar char=""/>
             </a:pPr>
             <a:r>
-              <a:rPr b="0" lang="en-US" sz="2000" spc="-1" strike="noStrike">
+              <a:rPr b="0" lang="en-US" sz="1800" spc="-1" strike="noStrike">
                 <a:latin typeface="Arial"/>
               </a:rPr>
               <a:t>Fifth Outline Level</a:t>
             </a:r>
-            <a:endParaRPr b="0" lang="en-US" sz="2000" spc="-1" strike="noStrike">
+            <a:endParaRPr b="0" lang="en-US" sz="1800" spc="-1" strike="noStrike">
               <a:latin typeface="Arial"/>
             </a:endParaRPr>
           </a:p>
@@ -3460,12 +3197,12 @@
               <a:buChar char=""/>
             </a:pPr>
             <a:r>
-              <a:rPr b="0" lang="en-US" sz="2000" spc="-1" strike="noStrike">
+              <a:rPr b="0" lang="en-US" sz="1800" spc="-1" strike="noStrike">
                 <a:latin typeface="Arial"/>
               </a:rPr>
               <a:t>Sixth Outline Level</a:t>
             </a:r>
-            <a:endParaRPr b="0" lang="en-US" sz="2000" spc="-1" strike="noStrike">
+            <a:endParaRPr b="0" lang="en-US" sz="1800" spc="-1" strike="noStrike">
               <a:latin typeface="Arial"/>
             </a:endParaRPr>
           </a:p>
@@ -3482,13 +3219,180 @@
               <a:buChar char=""/>
             </a:pPr>
             <a:r>
-              <a:rPr b="0" lang="en-US" sz="2000" spc="-1" strike="noStrike">
+              <a:rPr b="0" lang="en-US" sz="1800" spc="-1" strike="noStrike">
                 <a:latin typeface="Arial"/>
               </a:rPr>
               <a:t>Seventh Outline Level</a:t>
             </a:r>
-            <a:endParaRPr b="0" lang="en-US" sz="2000" spc="-1" strike="noStrike">
-              <a:latin typeface="Arial"/>
+            <a:endParaRPr b="0" lang="en-US" sz="1800" spc="-1" strike="noStrike">
+              <a:latin typeface="Arial"/>
+            </a:endParaRPr>
+          </a:p>
+        </p:txBody>
+      </p:sp>
+      <p:sp>
+        <p:nvSpPr>
+          <p:cNvPr id="2" name="PlaceHolder 3"/>
+          <p:cNvSpPr>
+            <a:spLocks noGrp="1"/>
+          </p:cNvSpPr>
+          <p:nvPr>
+            <p:ph type="ftr" idx="1"/>
+          </p:nvPr>
+        </p:nvSpPr>
+        <p:spPr>
+          <a:xfrm>
+            <a:off x="3029040" y="4767120"/>
+            <a:ext cx="3085200" cy="272880"/>
+          </a:xfrm>
+          <a:prstGeom prst="rect">
+            <a:avLst/>
+          </a:prstGeom>
+          <a:noFill/>
+          <a:ln w="0">
+            <a:noFill/>
+          </a:ln>
+        </p:spPr>
+        <p:txBody>
+          <a:bodyPr lIns="90000" rIns="90000" tIns="45000" bIns="45000" anchor="ctr">
+            <a:noAutofit/>
+          </a:bodyPr>
+          <a:lstStyle>
+            <a:lvl1pPr algn="ctr">
+              <a:lnSpc>
+                <a:spcPct val="100000"/>
+              </a:lnSpc>
+              <a:buNone/>
+              <a:defRPr b="0" lang="en-US" sz="1400" spc="-1" strike="noStrike">
+                <a:latin typeface="Times New Roman"/>
+              </a:defRPr>
+            </a:lvl1pPr>
+          </a:lstStyle>
+          <a:p>
+            <a:pPr algn="ctr">
+              <a:lnSpc>
+                <a:spcPct val="100000"/>
+              </a:lnSpc>
+              <a:buNone/>
+            </a:pPr>
+            <a:r>
+              <a:rPr b="0" lang="en-US" sz="1400" spc="-1" strike="noStrike">
+                <a:latin typeface="Times New Roman"/>
+              </a:rPr>
+              <a:t>&lt;footer&gt;</a:t>
+            </a:r>
+            <a:endParaRPr b="0" lang="en-US" sz="1400" spc="-1" strike="noStrike">
+              <a:latin typeface="Times New Roman"/>
+            </a:endParaRPr>
+          </a:p>
+        </p:txBody>
+      </p:sp>
+      <p:sp>
+        <p:nvSpPr>
+          <p:cNvPr id="3" name="PlaceHolder 4"/>
+          <p:cNvSpPr>
+            <a:spLocks noGrp="1"/>
+          </p:cNvSpPr>
+          <p:nvPr>
+            <p:ph type="sldNum" idx="2"/>
+          </p:nvPr>
+        </p:nvSpPr>
+        <p:spPr>
+          <a:xfrm>
+            <a:off x="6458040" y="4767120"/>
+            <a:ext cx="2056320" cy="272880"/>
+          </a:xfrm>
+          <a:prstGeom prst="rect">
+            <a:avLst/>
+          </a:prstGeom>
+          <a:noFill/>
+          <a:ln w="0">
+            <a:noFill/>
+          </a:ln>
+        </p:spPr>
+        <p:txBody>
+          <a:bodyPr lIns="90000" rIns="90000" tIns="45000" bIns="45000" anchor="ctr">
+            <a:noAutofit/>
+          </a:bodyPr>
+          <a:lstStyle>
+            <a:lvl1pPr algn="r">
+              <a:lnSpc>
+                <a:spcPct val="100000"/>
+              </a:lnSpc>
+              <a:buNone/>
+              <a:defRPr b="0" lang="en-US" sz="900" spc="-1" strike="noStrike">
+                <a:solidFill>
+                  <a:srgbClr val="8b8b8b"/>
+                </a:solidFill>
+                <a:latin typeface="Calibri"/>
+              </a:defRPr>
+            </a:lvl1pPr>
+          </a:lstStyle>
+          <a:p>
+            <a:pPr algn="r">
+              <a:lnSpc>
+                <a:spcPct val="100000"/>
+              </a:lnSpc>
+              <a:buNone/>
+            </a:pPr>
+            <a:fld id="{28DF05B0-BFDB-449A-8416-8AC97870008D}" type="slidenum">
+              <a:rPr b="0" lang="en-US" sz="900" spc="-1" strike="noStrike">
+                <a:solidFill>
+                  <a:srgbClr val="8b8b8b"/>
+                </a:solidFill>
+                <a:latin typeface="Calibri"/>
+              </a:rPr>
+              <a:t>&lt;number&gt;</a:t>
+            </a:fld>
+            <a:endParaRPr b="0" lang="en-US" sz="900" spc="-1" strike="noStrike">
+              <a:latin typeface="Times New Roman"/>
+            </a:endParaRPr>
+          </a:p>
+        </p:txBody>
+      </p:sp>
+      <p:sp>
+        <p:nvSpPr>
+          <p:cNvPr id="4" name="PlaceHolder 5"/>
+          <p:cNvSpPr>
+            <a:spLocks noGrp="1"/>
+          </p:cNvSpPr>
+          <p:nvPr>
+            <p:ph type="dt" idx="3"/>
+          </p:nvPr>
+        </p:nvSpPr>
+        <p:spPr>
+          <a:xfrm>
+            <a:off x="628560" y="4767120"/>
+            <a:ext cx="2056320" cy="272880"/>
+          </a:xfrm>
+          <a:prstGeom prst="rect">
+            <a:avLst/>
+          </a:prstGeom>
+          <a:noFill/>
+          <a:ln w="0">
+            <a:noFill/>
+          </a:ln>
+        </p:spPr>
+        <p:txBody>
+          <a:bodyPr lIns="90000" rIns="90000" tIns="45000" bIns="45000" anchor="ctr">
+            <a:noAutofit/>
+          </a:bodyPr>
+          <a:lstStyle>
+            <a:lvl1pPr>
+              <a:defRPr b="0" lang="en-US" sz="1400" spc="-1" strike="noStrike">
+                <a:latin typeface="Times New Roman"/>
+              </a:defRPr>
+            </a:lvl1pPr>
+          </a:lstStyle>
+          <a:p>
+            <a:r>
+              <a:rPr b="0" lang="en-US" sz="1400" spc="-1" strike="noStrike">
+                <a:latin typeface="Times New Roman"/>
+              </a:rPr>
+              <a:t>&lt;date/time&gt;</a:t>
+            </a:r>
+            <a:endParaRPr b="0" lang="en-US" sz="1400" spc="-1" strike="noStrike">
+              <a:latin typeface="Times New Roman"/>
             </a:endParaRPr>
           </a:p>
         </p:txBody>
@@ -3539,7 +3443,7 @@
         <p:spPr>
           <a:xfrm>
             <a:off x="186840" y="178200"/>
-            <a:ext cx="8769960" cy="4757760"/>
+            <a:ext cx="8769600" cy="4757400"/>
           </a:xfrm>
           <a:prstGeom prst="roundRect">
             <a:avLst>
@@ -3577,7 +3481,7 @@
         <p:spPr>
           <a:xfrm>
             <a:off x="460080" y="622080"/>
-            <a:ext cx="6925680" cy="3306600"/>
+            <a:ext cx="6925320" cy="3306240"/>
           </a:xfrm>
           <a:prstGeom prst="rect">
             <a:avLst/>
@@ -3633,7 +3537,7 @@
         <p:spPr>
           <a:xfrm>
             <a:off x="5753880" y="2557440"/>
-            <a:ext cx="4009680" cy="3133080"/>
+            <a:ext cx="4009320" cy="3132720"/>
           </a:xfrm>
           <a:prstGeom prst="rect">
             <a:avLst/>
@@ -3682,7 +3586,7 @@
         <p:spPr>
           <a:xfrm>
             <a:off x="186840" y="178200"/>
-            <a:ext cx="8769960" cy="4757760"/>
+            <a:ext cx="8769600" cy="4757400"/>
           </a:xfrm>
           <a:prstGeom prst="roundRect">
             <a:avLst>
@@ -3720,7 +3624,7 @@
         <p:spPr>
           <a:xfrm>
             <a:off x="460080" y="622080"/>
-            <a:ext cx="6925680" cy="3306600"/>
+            <a:ext cx="6925320" cy="3306240"/>
           </a:xfrm>
           <a:prstGeom prst="rect">
             <a:avLst/>
@@ -3776,7 +3680,7 @@
         <p:spPr>
           <a:xfrm>
             <a:off x="5753880" y="2557440"/>
-            <a:ext cx="4009680" cy="3133080"/>
+            <a:ext cx="4009320" cy="3132720"/>
           </a:xfrm>
           <a:prstGeom prst="rect">
             <a:avLst/>
@@ -3829,7 +3733,7 @@
         <p:spPr>
           <a:xfrm>
             <a:off x="5753880" y="2557440"/>
-            <a:ext cx="4009680" cy="3133080"/>
+            <a:ext cx="4009320" cy="3132720"/>
           </a:xfrm>
           <a:prstGeom prst="rect">
             <a:avLst/>
@@ -3848,7 +3752,7 @@
         <p:spPr>
           <a:xfrm>
             <a:off x="185760" y="831240"/>
-            <a:ext cx="899280" cy="899280"/>
+            <a:ext cx="898920" cy="898920"/>
           </a:xfrm>
           <a:prstGeom prst="ellipse">
             <a:avLst/>
@@ -3908,7 +3812,7 @@
         <p:spPr>
           <a:xfrm>
             <a:off x="185760" y="2381400"/>
-            <a:ext cx="899280" cy="887400"/>
+            <a:ext cx="898920" cy="887040"/>
           </a:xfrm>
           <a:prstGeom prst="ellipse">
             <a:avLst/>
@@ -3968,7 +3872,7 @@
         <p:spPr>
           <a:xfrm>
             <a:off x="185760" y="3860640"/>
-            <a:ext cx="899280" cy="899280"/>
+            <a:ext cx="898920" cy="898920"/>
           </a:xfrm>
           <a:prstGeom prst="ellipse">
             <a:avLst/>
@@ -4028,7 +3932,7 @@
         <p:spPr>
           <a:xfrm>
             <a:off x="967680" y="797040"/>
-            <a:ext cx="3764520" cy="550440"/>
+            <a:ext cx="3764160" cy="550080"/>
           </a:xfrm>
           <a:prstGeom prst="rect">
             <a:avLst/>
@@ -4090,7 +3994,7 @@
         <p:spPr>
           <a:xfrm>
             <a:off x="967680" y="1332720"/>
-            <a:ext cx="3764520" cy="789480"/>
+            <a:ext cx="3764160" cy="789120"/>
           </a:xfrm>
           <a:prstGeom prst="rect">
             <a:avLst/>
@@ -4152,7 +4056,7 @@
         <p:spPr>
           <a:xfrm>
             <a:off x="964080" y="2292480"/>
-            <a:ext cx="3764520" cy="550440"/>
+            <a:ext cx="3764160" cy="550080"/>
           </a:xfrm>
           <a:prstGeom prst="rect">
             <a:avLst/>
@@ -4204,7 +4108,7 @@
         <p:spPr>
           <a:xfrm>
             <a:off x="964080" y="2825280"/>
-            <a:ext cx="3764520" cy="843120"/>
+            <a:ext cx="3764160" cy="842760"/>
           </a:xfrm>
           <a:prstGeom prst="rect">
             <a:avLst/>
@@ -4266,7 +4170,7 @@
         <p:spPr>
           <a:xfrm>
             <a:off x="964080" y="3777840"/>
-            <a:ext cx="3764520" cy="550440"/>
+            <a:ext cx="3764160" cy="550080"/>
           </a:xfrm>
           <a:prstGeom prst="rect">
             <a:avLst/>
@@ -4318,7 +4222,7 @@
         <p:spPr>
           <a:xfrm>
             <a:off x="964080" y="4310640"/>
-            <a:ext cx="3764520" cy="794520"/>
+            <a:ext cx="3764160" cy="794160"/>
           </a:xfrm>
           <a:prstGeom prst="rect">
             <a:avLst/>
@@ -4380,7 +4284,7 @@
         <p:spPr>
           <a:xfrm>
             <a:off x="5084640" y="987840"/>
-            <a:ext cx="3687480" cy="3496680"/>
+            <a:ext cx="3687120" cy="3496320"/>
           </a:xfrm>
           <a:prstGeom prst="roundRect">
             <a:avLst>
@@ -4444,7 +4348,7 @@
         <p:spPr>
           <a:xfrm>
             <a:off x="8519760" y="4831560"/>
-            <a:ext cx="484560" cy="226800"/>
+            <a:ext cx="484200" cy="226800"/>
           </a:xfrm>
           <a:prstGeom prst="rect">
             <a:avLst/>
@@ -4496,7 +4400,7 @@
         <p:spPr>
           <a:xfrm>
             <a:off x="421200" y="228600"/>
-            <a:ext cx="8457840" cy="685440"/>
+            <a:ext cx="8457480" cy="685080"/>
           </a:xfrm>
           <a:prstGeom prst="rect">
             <a:avLst/>
@@ -4525,7 +4429,11 @@
             </a:pPr>
             <a:r>
               <a:rPr b="0" lang="en-US" sz="1800" spc="-1" strike="noStrike">
-                <a:latin typeface="Arial"/>
+                <a:solidFill>
+                  <a:srgbClr val="000000"/>
+                </a:solidFill>
+                <a:latin typeface="Arial"/>
+                <a:ea typeface="DejaVu Sans"/>
               </a:rPr>
               <a:t>TITLE</a:t>
             </a:r>
@@ -4574,7 +4482,7 @@
         <p:spPr>
           <a:xfrm>
             <a:off x="506520" y="1484640"/>
-            <a:ext cx="2556720" cy="2055240"/>
+            <a:ext cx="2556360" cy="2054880"/>
           </a:xfrm>
           <a:prstGeom prst="roundRect">
             <a:avLst>
@@ -4614,7 +4522,7 @@
         <p:spPr>
           <a:xfrm>
             <a:off x="624240" y="1616760"/>
-            <a:ext cx="2289600" cy="729000"/>
+            <a:ext cx="2289240" cy="728640"/>
           </a:xfrm>
           <a:prstGeom prst="rect">
             <a:avLst/>
@@ -4666,7 +4574,7 @@
         <p:spPr>
           <a:xfrm>
             <a:off x="624240" y="2400480"/>
-            <a:ext cx="2289600" cy="1162080"/>
+            <a:ext cx="2289240" cy="1161720"/>
           </a:xfrm>
           <a:prstGeom prst="rect">
             <a:avLst/>
@@ -4728,7 +4636,7 @@
         <p:spPr>
           <a:xfrm>
             <a:off x="3309120" y="2066040"/>
-            <a:ext cx="2556720" cy="2055240"/>
+            <a:ext cx="2556360" cy="2054880"/>
           </a:xfrm>
           <a:prstGeom prst="roundRect">
             <a:avLst>
@@ -4768,7 +4676,7 @@
         <p:spPr>
           <a:xfrm>
             <a:off x="3426840" y="2198160"/>
-            <a:ext cx="2289600" cy="729000"/>
+            <a:ext cx="2289240" cy="728640"/>
           </a:xfrm>
           <a:prstGeom prst="rect">
             <a:avLst/>
@@ -4820,7 +4728,7 @@
         <p:spPr>
           <a:xfrm>
             <a:off x="3426840" y="2981880"/>
-            <a:ext cx="2289600" cy="1162080"/>
+            <a:ext cx="2289240" cy="1161720"/>
           </a:xfrm>
           <a:prstGeom prst="rect">
             <a:avLst/>
@@ -4872,7 +4780,7 @@
         <p:spPr>
           <a:xfrm>
             <a:off x="6111720" y="2659320"/>
-            <a:ext cx="2556720" cy="2055240"/>
+            <a:ext cx="2556360" cy="2054880"/>
           </a:xfrm>
           <a:prstGeom prst="roundRect">
             <a:avLst>
@@ -4912,7 +4820,7 @@
         <p:spPr>
           <a:xfrm>
             <a:off x="6229440" y="2791440"/>
-            <a:ext cx="2289600" cy="729000"/>
+            <a:ext cx="2289240" cy="728640"/>
           </a:xfrm>
           <a:prstGeom prst="rect">
             <a:avLst/>
@@ -4947,7 +4855,7 @@
                 <a:latin typeface="Arial"/>
                 <a:ea typeface="DejaVu Sans"/>
               </a:rPr>
-              <a:t>SUBTITLE2</a:t>
+              <a:t>SUBTITLE3</a:t>
             </a:r>
             <a:endParaRPr b="0" lang="en-US" sz="1400" spc="-1" strike="noStrike">
               <a:latin typeface="Arial"/>
@@ -4964,7 +4872,7 @@
         <p:spPr>
           <a:xfrm>
             <a:off x="6229440" y="3574800"/>
-            <a:ext cx="2289600" cy="1162080"/>
+            <a:ext cx="2289240" cy="1161720"/>
           </a:xfrm>
           <a:prstGeom prst="rect">
             <a:avLst/>
@@ -4999,7 +4907,7 @@
                 <a:latin typeface="Arial"/>
                 <a:ea typeface="DejaVu Sans"/>
               </a:rPr>
-              <a:t>TEXT2</a:t>
+              <a:t>TEXT3</a:t>
             </a:r>
             <a:endParaRPr b="0" lang="en-US" sz="1100" spc="-1" strike="noStrike">
               <a:latin typeface="Arial"/>
@@ -5016,7 +4924,7 @@
         <p:spPr>
           <a:xfrm>
             <a:off x="8519760" y="4831560"/>
-            <a:ext cx="484560" cy="226800"/>
+            <a:ext cx="484200" cy="226800"/>
           </a:xfrm>
           <a:prstGeom prst="rect">
             <a:avLst/>
@@ -5068,7 +4976,7 @@
         <p:spPr>
           <a:xfrm>
             <a:off x="457200" y="228600"/>
-            <a:ext cx="8229240" cy="1142640"/>
+            <a:ext cx="8228880" cy="1142280"/>
           </a:xfrm>
           <a:prstGeom prst="rect">
             <a:avLst/>
@@ -5097,7 +5005,11 @@
             </a:pPr>
             <a:r>
               <a:rPr b="0" lang="en-US" sz="1800" spc="-1" strike="noStrike">
-                <a:latin typeface="Arial"/>
+                <a:solidFill>
+                  <a:srgbClr val="000000"/>
+                </a:solidFill>
+                <a:latin typeface="Arial"/>
+                <a:ea typeface="DejaVu Sans"/>
               </a:rPr>
               <a:t>TITLE</a:t>
             </a:r>
@@ -5146,7 +5058,7 @@
         <p:spPr>
           <a:xfrm>
             <a:off x="3601800" y="3271680"/>
-            <a:ext cx="5236200" cy="1320840"/>
+            <a:ext cx="5235840" cy="1320480"/>
           </a:xfrm>
           <a:prstGeom prst="roundRect">
             <a:avLst>
@@ -5184,7 +5096,7 @@
         <p:spPr>
           <a:xfrm>
             <a:off x="6308640" y="1028880"/>
-            <a:ext cx="2532960" cy="2056680"/>
+            <a:ext cx="2532600" cy="2056320"/>
           </a:xfrm>
           <a:prstGeom prst="roundRect">
             <a:avLst>
@@ -5222,7 +5134,7 @@
         <p:spPr>
           <a:xfrm>
             <a:off x="3604320" y="1014480"/>
-            <a:ext cx="2532960" cy="2056680"/>
+            <a:ext cx="2532600" cy="2056320"/>
           </a:xfrm>
           <a:prstGeom prst="roundRect">
             <a:avLst>
@@ -5260,7 +5172,7 @@
         <p:spPr>
           <a:xfrm>
             <a:off x="3696480" y="1059120"/>
-            <a:ext cx="2343240" cy="713520"/>
+            <a:ext cx="2342880" cy="713160"/>
           </a:xfrm>
           <a:prstGeom prst="rect">
             <a:avLst/>
@@ -5322,7 +5234,7 @@
         <p:spPr>
           <a:xfrm>
             <a:off x="3696480" y="1843560"/>
-            <a:ext cx="2343240" cy="1141920"/>
+            <a:ext cx="2342880" cy="1141560"/>
           </a:xfrm>
           <a:prstGeom prst="rect">
             <a:avLst/>
@@ -5384,7 +5296,7 @@
         <p:spPr>
           <a:xfrm>
             <a:off x="6400080" y="1059120"/>
-            <a:ext cx="2340000" cy="713520"/>
+            <a:ext cx="2339640" cy="713160"/>
           </a:xfrm>
           <a:prstGeom prst="rect">
             <a:avLst/>
@@ -5436,7 +5348,7 @@
         <p:spPr>
           <a:xfrm>
             <a:off x="6400080" y="1843560"/>
-            <a:ext cx="2340000" cy="1141920"/>
+            <a:ext cx="2339640" cy="1141560"/>
           </a:xfrm>
           <a:prstGeom prst="rect">
             <a:avLst/>
@@ -5498,7 +5410,7 @@
         <p:spPr>
           <a:xfrm>
             <a:off x="3696480" y="3362040"/>
-            <a:ext cx="5236200" cy="328680"/>
+            <a:ext cx="5235840" cy="328320"/>
           </a:xfrm>
           <a:prstGeom prst="rect">
             <a:avLst/>
@@ -5550,7 +5462,7 @@
         <p:spPr>
           <a:xfrm>
             <a:off x="3696480" y="3713400"/>
-            <a:ext cx="5146560" cy="713520"/>
+            <a:ext cx="5146200" cy="713160"/>
           </a:xfrm>
           <a:prstGeom prst="rect">
             <a:avLst/>
@@ -5612,7 +5524,7 @@
         <p:spPr>
           <a:xfrm>
             <a:off x="384840" y="1028880"/>
-            <a:ext cx="3002400" cy="3564000"/>
+            <a:ext cx="3002040" cy="3563640"/>
           </a:xfrm>
           <a:prstGeom prst="roundRect">
             <a:avLst>
@@ -5676,7 +5588,7 @@
         <p:spPr>
           <a:xfrm>
             <a:off x="8519760" y="4831560"/>
-            <a:ext cx="484560" cy="226800"/>
+            <a:ext cx="484200" cy="226800"/>
           </a:xfrm>
           <a:prstGeom prst="rect">
             <a:avLst/>
@@ -5728,7 +5640,7 @@
         <p:spPr>
           <a:xfrm>
             <a:off x="313200" y="228600"/>
-            <a:ext cx="8457840" cy="685440"/>
+            <a:ext cx="8457480" cy="685080"/>
           </a:xfrm>
           <a:prstGeom prst="rect">
             <a:avLst/>
@@ -5757,7 +5669,11 @@
             </a:pPr>
             <a:r>
               <a:rPr b="0" lang="en-US" sz="1800" spc="-1" strike="noStrike">
-                <a:latin typeface="Arial"/>
+                <a:solidFill>
+                  <a:srgbClr val="000000"/>
+                </a:solidFill>
+                <a:latin typeface="Arial"/>
+                <a:ea typeface="DejaVu Sans"/>
               </a:rPr>
               <a:t>TITLE</a:t>
             </a:r>
@@ -5810,7 +5726,7 @@
         <p:spPr>
           <a:xfrm>
             <a:off x="-877680" y="2245320"/>
-            <a:ext cx="4613040" cy="3604680"/>
+            <a:ext cx="4612680" cy="3604320"/>
           </a:xfrm>
           <a:prstGeom prst="rect">
             <a:avLst/>
@@ -5829,7 +5745,7 @@
         <p:spPr>
           <a:xfrm>
             <a:off x="4157640" y="631080"/>
-            <a:ext cx="899280" cy="899280"/>
+            <a:ext cx="898920" cy="898920"/>
           </a:xfrm>
           <a:prstGeom prst="ellipse">
             <a:avLst/>
@@ -5891,7 +5807,7 @@
         <p:spPr>
           <a:xfrm>
             <a:off x="4157640" y="2127600"/>
-            <a:ext cx="899280" cy="887400"/>
+            <a:ext cx="898920" cy="887040"/>
           </a:xfrm>
           <a:prstGeom prst="ellipse">
             <a:avLst/>
@@ -5953,7 +5869,7 @@
         <p:spPr>
           <a:xfrm>
             <a:off x="4157640" y="3612240"/>
-            <a:ext cx="899280" cy="899280"/>
+            <a:ext cx="898920" cy="898920"/>
           </a:xfrm>
           <a:prstGeom prst="ellipse">
             <a:avLst/>
@@ -6015,7 +5931,7 @@
         <p:spPr>
           <a:xfrm>
             <a:off x="5146560" y="489600"/>
-            <a:ext cx="3578760" cy="550440"/>
+            <a:ext cx="3578400" cy="550080"/>
           </a:xfrm>
           <a:prstGeom prst="rect">
             <a:avLst/>
@@ -6077,7 +5993,7 @@
         <p:spPr>
           <a:xfrm>
             <a:off x="5146560" y="1025280"/>
-            <a:ext cx="3578760" cy="789480"/>
+            <a:ext cx="3578400" cy="789120"/>
           </a:xfrm>
           <a:prstGeom prst="rect">
             <a:avLst/>
@@ -6139,7 +6055,7 @@
         <p:spPr>
           <a:xfrm>
             <a:off x="5142960" y="1985400"/>
-            <a:ext cx="3578760" cy="550440"/>
+            <a:ext cx="3578400" cy="550080"/>
           </a:xfrm>
           <a:prstGeom prst="rect">
             <a:avLst/>
@@ -6191,7 +6107,7 @@
         <p:spPr>
           <a:xfrm>
             <a:off x="5142960" y="2517840"/>
-            <a:ext cx="3578760" cy="843120"/>
+            <a:ext cx="3578400" cy="842760"/>
           </a:xfrm>
           <a:prstGeom prst="rect">
             <a:avLst/>
@@ -6253,7 +6169,7 @@
         <p:spPr>
           <a:xfrm>
             <a:off x="5142960" y="3470760"/>
-            <a:ext cx="3578760" cy="550440"/>
+            <a:ext cx="3578400" cy="550080"/>
           </a:xfrm>
           <a:prstGeom prst="rect">
             <a:avLst/>
@@ -6305,7 +6221,7 @@
         <p:spPr>
           <a:xfrm>
             <a:off x="5142960" y="4003560"/>
-            <a:ext cx="3578760" cy="794520"/>
+            <a:ext cx="3578400" cy="794160"/>
           </a:xfrm>
           <a:prstGeom prst="rect">
             <a:avLst/>
@@ -6367,7 +6283,7 @@
         <p:spPr>
           <a:xfrm>
             <a:off x="8519760" y="4831560"/>
-            <a:ext cx="484560" cy="226800"/>
+            <a:ext cx="484200" cy="226800"/>
           </a:xfrm>
           <a:prstGeom prst="rect">
             <a:avLst/>
@@ -6419,7 +6335,7 @@
         <p:spPr>
           <a:xfrm>
             <a:off x="264600" y="228600"/>
-            <a:ext cx="3657240" cy="2016360"/>
+            <a:ext cx="3656880" cy="2016000"/>
           </a:xfrm>
           <a:prstGeom prst="rect">
             <a:avLst/>
@@ -6448,7 +6364,11 @@
             </a:pPr>
             <a:r>
               <a:rPr b="0" lang="en-US" sz="1800" spc="-1" strike="noStrike">
-                <a:latin typeface="Arial"/>
+                <a:solidFill>
+                  <a:srgbClr val="000000"/>
+                </a:solidFill>
+                <a:latin typeface="Arial"/>
+                <a:ea typeface="DejaVu Sans"/>
               </a:rPr>
               <a:t>TITLE</a:t>
             </a:r>
@@ -6497,7 +6417,7 @@
         <p:spPr>
           <a:xfrm>
             <a:off x="4238640" y="831240"/>
-            <a:ext cx="899280" cy="899280"/>
+            <a:ext cx="898920" cy="898920"/>
           </a:xfrm>
           <a:prstGeom prst="ellipse">
             <a:avLst/>
@@ -6557,7 +6477,7 @@
         <p:spPr>
           <a:xfrm>
             <a:off x="4238640" y="2243880"/>
-            <a:ext cx="899280" cy="887400"/>
+            <a:ext cx="898920" cy="887040"/>
           </a:xfrm>
           <a:prstGeom prst="ellipse">
             <a:avLst/>
@@ -6617,7 +6537,7 @@
         <p:spPr>
           <a:xfrm>
             <a:off x="4238640" y="3667320"/>
-            <a:ext cx="899280" cy="899280"/>
+            <a:ext cx="898920" cy="898920"/>
           </a:xfrm>
           <a:prstGeom prst="ellipse">
             <a:avLst/>
@@ -6677,7 +6597,7 @@
         <p:spPr>
           <a:xfrm>
             <a:off x="5020200" y="797040"/>
-            <a:ext cx="3764520" cy="550440"/>
+            <a:ext cx="3764160" cy="550080"/>
           </a:xfrm>
           <a:prstGeom prst="rect">
             <a:avLst/>
@@ -6739,7 +6659,7 @@
         <p:spPr>
           <a:xfrm>
             <a:off x="5020200" y="1332720"/>
-            <a:ext cx="3764520" cy="789480"/>
+            <a:ext cx="3764160" cy="789120"/>
           </a:xfrm>
           <a:prstGeom prst="rect">
             <a:avLst/>
@@ -6801,7 +6721,7 @@
         <p:spPr>
           <a:xfrm>
             <a:off x="5016600" y="2155320"/>
-            <a:ext cx="3764520" cy="550440"/>
+            <a:ext cx="3764160" cy="550080"/>
           </a:xfrm>
           <a:prstGeom prst="rect">
             <a:avLst/>
@@ -6853,7 +6773,7 @@
         <p:spPr>
           <a:xfrm>
             <a:off x="5016600" y="2687760"/>
-            <a:ext cx="3764520" cy="843120"/>
+            <a:ext cx="3764160" cy="842760"/>
           </a:xfrm>
           <a:prstGeom prst="rect">
             <a:avLst/>
@@ -6915,7 +6835,7 @@
         <p:spPr>
           <a:xfrm>
             <a:off x="5016600" y="3584880"/>
-            <a:ext cx="3764520" cy="550440"/>
+            <a:ext cx="3764160" cy="550080"/>
           </a:xfrm>
           <a:prstGeom prst="rect">
             <a:avLst/>
@@ -6967,7 +6887,7 @@
         <p:spPr>
           <a:xfrm>
             <a:off x="5016600" y="4117320"/>
-            <a:ext cx="3764520" cy="794520"/>
+            <a:ext cx="3764160" cy="794160"/>
           </a:xfrm>
           <a:prstGeom prst="rect">
             <a:avLst/>
@@ -7029,7 +6949,7 @@
         <p:spPr>
           <a:xfrm>
             <a:off x="384840" y="987840"/>
-            <a:ext cx="3687480" cy="3496680"/>
+            <a:ext cx="3687120" cy="3496320"/>
           </a:xfrm>
           <a:prstGeom prst="roundRect">
             <a:avLst>
@@ -7093,7 +7013,7 @@
         <p:spPr>
           <a:xfrm>
             <a:off x="8519760" y="4831560"/>
-            <a:ext cx="484560" cy="226800"/>
+            <a:ext cx="484200" cy="226800"/>
           </a:xfrm>
           <a:prstGeom prst="rect">
             <a:avLst/>
@@ -7145,7 +7065,7 @@
         <p:spPr>
           <a:xfrm>
             <a:off x="300600" y="228600"/>
-            <a:ext cx="8614440" cy="685440"/>
+            <a:ext cx="8614080" cy="685080"/>
           </a:xfrm>
           <a:prstGeom prst="rect">
             <a:avLst/>
@@ -7174,7 +7094,11 @@
             </a:pPr>
             <a:r>
               <a:rPr b="0" lang="en-US" sz="1800" spc="-1" strike="noStrike">
-                <a:latin typeface="Arial"/>
+                <a:solidFill>
+                  <a:srgbClr val="000000"/>
+                </a:solidFill>
+                <a:latin typeface="Arial"/>
+                <a:ea typeface="DejaVu Sans"/>
               </a:rPr>
               <a:t>TITLE</a:t>
             </a:r>
@@ -7223,7 +7147,7 @@
         <p:spPr>
           <a:xfrm>
             <a:off x="0" y="3075480"/>
-            <a:ext cx="9143280" cy="2494800"/>
+            <a:ext cx="9142920" cy="2494440"/>
           </a:xfrm>
           <a:prstGeom prst="roundRect">
             <a:avLst>
@@ -7287,7 +7211,7 @@
         <p:spPr>
           <a:xfrm>
             <a:off x="474840" y="841680"/>
-            <a:ext cx="2556720" cy="2055240"/>
+            <a:ext cx="2556360" cy="2054880"/>
           </a:xfrm>
           <a:prstGeom prst="roundRect">
             <a:avLst>
@@ -7327,7 +7251,7 @@
         <p:spPr>
           <a:xfrm>
             <a:off x="592920" y="973800"/>
-            <a:ext cx="2289600" cy="729000"/>
+            <a:ext cx="2289240" cy="728640"/>
           </a:xfrm>
           <a:prstGeom prst="rect">
             <a:avLst/>
@@ -7379,7 +7303,7 @@
         <p:spPr>
           <a:xfrm>
             <a:off x="592920" y="1757520"/>
-            <a:ext cx="2289600" cy="1162080"/>
+            <a:ext cx="2289240" cy="1161720"/>
           </a:xfrm>
           <a:prstGeom prst="rect">
             <a:avLst/>
@@ -7441,7 +7365,7 @@
         <p:spPr>
           <a:xfrm>
             <a:off x="3309120" y="841680"/>
-            <a:ext cx="2556720" cy="2055240"/>
+            <a:ext cx="2556360" cy="2054880"/>
           </a:xfrm>
           <a:prstGeom prst="roundRect">
             <a:avLst>
@@ -7481,7 +7405,7 @@
         <p:spPr>
           <a:xfrm>
             <a:off x="3426840" y="973800"/>
-            <a:ext cx="2289600" cy="729000"/>
+            <a:ext cx="2289240" cy="728640"/>
           </a:xfrm>
           <a:prstGeom prst="rect">
             <a:avLst/>
@@ -7533,7 +7457,7 @@
         <p:spPr>
           <a:xfrm>
             <a:off x="3426840" y="1757520"/>
-            <a:ext cx="2289600" cy="1162080"/>
+            <a:ext cx="2289240" cy="1161720"/>
           </a:xfrm>
           <a:prstGeom prst="rect">
             <a:avLst/>
@@ -7585,7 +7509,7 @@
         <p:spPr>
           <a:xfrm>
             <a:off x="6143040" y="841680"/>
-            <a:ext cx="2556720" cy="2055240"/>
+            <a:ext cx="2556360" cy="2054880"/>
           </a:xfrm>
           <a:prstGeom prst="roundRect">
             <a:avLst>
@@ -7625,7 +7549,7 @@
         <p:spPr>
           <a:xfrm>
             <a:off x="6260760" y="973800"/>
-            <a:ext cx="2289600" cy="729000"/>
+            <a:ext cx="2289240" cy="728640"/>
           </a:xfrm>
           <a:prstGeom prst="rect">
             <a:avLst/>
@@ -7677,7 +7601,7 @@
         <p:spPr>
           <a:xfrm>
             <a:off x="6260760" y="1757520"/>
-            <a:ext cx="2289600" cy="1162080"/>
+            <a:ext cx="2289240" cy="1161720"/>
           </a:xfrm>
           <a:prstGeom prst="rect">
             <a:avLst/>
@@ -7729,7 +7653,7 @@
         <p:spPr>
           <a:xfrm>
             <a:off x="8519760" y="4831560"/>
-            <a:ext cx="484560" cy="226800"/>
+            <a:ext cx="484200" cy="226800"/>
           </a:xfrm>
           <a:prstGeom prst="rect">
             <a:avLst/>
@@ -7781,7 +7705,7 @@
         <p:spPr>
           <a:xfrm>
             <a:off x="457200" y="349200"/>
-            <a:ext cx="8457840" cy="1022040"/>
+            <a:ext cx="8457480" cy="1021680"/>
           </a:xfrm>
           <a:prstGeom prst="rect">
             <a:avLst/>
@@ -7810,7 +7734,11 @@
             </a:pPr>
             <a:r>
               <a:rPr b="0" lang="en-US" sz="1800" spc="-1" strike="noStrike">
-                <a:latin typeface="Arial"/>
+                <a:solidFill>
+                  <a:srgbClr val="000000"/>
+                </a:solidFill>
+                <a:latin typeface="Arial"/>
+                <a:ea typeface="DejaVu Sans"/>
               </a:rPr>
               <a:t>TITLE</a:t>
             </a:r>
@@ -7866,7 +7794,7 @@
         <p:spPr>
           <a:xfrm>
             <a:off x="5014080" y="250200"/>
-            <a:ext cx="3820320" cy="4624920"/>
+            <a:ext cx="3819960" cy="4624560"/>
           </a:xfrm>
           <a:prstGeom prst="roundRect">
             <a:avLst>
@@ -7932,7 +7860,7 @@
         <p:spPr>
           <a:xfrm>
             <a:off x="329400" y="250200"/>
-            <a:ext cx="4424760" cy="4624920"/>
+            <a:ext cx="4424400" cy="4624560"/>
           </a:xfrm>
           <a:prstGeom prst="roundRect">
             <a:avLst>
@@ -7970,7 +7898,7 @@
         <p:spPr>
           <a:xfrm>
             <a:off x="581760" y="828720"/>
-            <a:ext cx="3901680" cy="550440"/>
+            <a:ext cx="3901320" cy="550080"/>
           </a:xfrm>
           <a:prstGeom prst="rect">
             <a:avLst/>
@@ -8032,7 +7960,7 @@
         <p:spPr>
           <a:xfrm>
             <a:off x="581760" y="1364400"/>
-            <a:ext cx="3901680" cy="789480"/>
+            <a:ext cx="3901320" cy="789120"/>
           </a:xfrm>
           <a:prstGeom prst="rect">
             <a:avLst/>
@@ -8094,7 +8022,7 @@
         <p:spPr>
           <a:xfrm>
             <a:off x="578160" y="2154600"/>
-            <a:ext cx="3901680" cy="550440"/>
+            <a:ext cx="3901320" cy="550080"/>
           </a:xfrm>
           <a:prstGeom prst="rect">
             <a:avLst/>
@@ -8146,7 +8074,7 @@
         <p:spPr>
           <a:xfrm>
             <a:off x="578160" y="2687040"/>
-            <a:ext cx="3901680" cy="843120"/>
+            <a:ext cx="3901320" cy="842760"/>
           </a:xfrm>
           <a:prstGeom prst="rect">
             <a:avLst/>
@@ -8208,7 +8136,7 @@
         <p:spPr>
           <a:xfrm>
             <a:off x="578160" y="3482280"/>
-            <a:ext cx="3901680" cy="550440"/>
+            <a:ext cx="3901320" cy="550080"/>
           </a:xfrm>
           <a:prstGeom prst="rect">
             <a:avLst/>
@@ -8260,7 +8188,7 @@
         <p:spPr>
           <a:xfrm>
             <a:off x="578160" y="4015080"/>
-            <a:ext cx="3901680" cy="794520"/>
+            <a:ext cx="3901320" cy="794160"/>
           </a:xfrm>
           <a:prstGeom prst="rect">
             <a:avLst/>
@@ -8322,7 +8250,7 @@
         <p:spPr>
           <a:xfrm>
             <a:off x="8519760" y="4831560"/>
-            <a:ext cx="484560" cy="226800"/>
+            <a:ext cx="484200" cy="226800"/>
           </a:xfrm>
           <a:prstGeom prst="rect">
             <a:avLst/>
@@ -8374,7 +8302,7 @@
         <p:spPr>
           <a:xfrm>
             <a:off x="493200" y="300600"/>
-            <a:ext cx="4078440" cy="842040"/>
+            <a:ext cx="4078080" cy="841680"/>
           </a:xfrm>
           <a:prstGeom prst="rect">
             <a:avLst/>
@@ -8403,7 +8331,11 @@
             </a:pPr>
             <a:r>
               <a:rPr b="0" lang="en-US" sz="1800" spc="-1" strike="noStrike">
-                <a:latin typeface="Arial"/>
+                <a:solidFill>
+                  <a:srgbClr val="000000"/>
+                </a:solidFill>
+                <a:latin typeface="Arial"/>
+                <a:ea typeface="DejaVu Sans"/>
               </a:rPr>
               <a:t>TITLE</a:t>
             </a:r>
@@ -8452,7 +8384,7 @@
         <p:spPr>
           <a:xfrm>
             <a:off x="479160" y="2886480"/>
-            <a:ext cx="365040" cy="359640"/>
+            <a:ext cx="364680" cy="359280"/>
           </a:xfrm>
           <a:prstGeom prst="roundRect">
             <a:avLst>
@@ -8482,7 +8414,7 @@
         <p:spPr>
           <a:xfrm>
             <a:off x="3440880" y="2886480"/>
-            <a:ext cx="365040" cy="359640"/>
+            <a:ext cx="364680" cy="359280"/>
           </a:xfrm>
           <a:prstGeom prst="roundRect">
             <a:avLst>
@@ -8512,7 +8444,7 @@
         <p:spPr>
           <a:xfrm>
             <a:off x="6402960" y="2886480"/>
-            <a:ext cx="365040" cy="359640"/>
+            <a:ext cx="364680" cy="359280"/>
           </a:xfrm>
           <a:prstGeom prst="roundRect">
             <a:avLst>
@@ -8542,7 +8474,7 @@
         <p:spPr>
           <a:xfrm>
             <a:off x="479160" y="2883600"/>
-            <a:ext cx="365040" cy="363960"/>
+            <a:ext cx="364680" cy="363960"/>
           </a:xfrm>
           <a:prstGeom prst="rect">
             <a:avLst/>
@@ -8594,7 +8526,7 @@
         <p:spPr>
           <a:xfrm>
             <a:off x="3440880" y="2883600"/>
-            <a:ext cx="365040" cy="363960"/>
+            <a:ext cx="364680" cy="363960"/>
           </a:xfrm>
           <a:prstGeom prst="rect">
             <a:avLst/>
@@ -8646,7 +8578,7 @@
         <p:spPr>
           <a:xfrm>
             <a:off x="6402960" y="2883600"/>
-            <a:ext cx="365040" cy="363960"/>
+            <a:ext cx="364680" cy="363960"/>
           </a:xfrm>
           <a:prstGeom prst="rect">
             <a:avLst/>
@@ -8698,7 +8630,7 @@
         <p:spPr>
           <a:xfrm>
             <a:off x="858960" y="2571840"/>
-            <a:ext cx="2354760" cy="713520"/>
+            <a:ext cx="2354400" cy="713160"/>
           </a:xfrm>
           <a:prstGeom prst="rect">
             <a:avLst/>
@@ -8760,7 +8692,7 @@
         <p:spPr>
           <a:xfrm>
             <a:off x="858960" y="3356280"/>
-            <a:ext cx="2354760" cy="1564920"/>
+            <a:ext cx="2354400" cy="1564560"/>
           </a:xfrm>
           <a:prstGeom prst="rect">
             <a:avLst/>
@@ -8822,7 +8754,7 @@
         <p:spPr>
           <a:xfrm>
             <a:off x="3821040" y="2571840"/>
-            <a:ext cx="2354760" cy="713520"/>
+            <a:ext cx="2354400" cy="713160"/>
           </a:xfrm>
           <a:prstGeom prst="rect">
             <a:avLst/>
@@ -8884,7 +8816,7 @@
         <p:spPr>
           <a:xfrm>
             <a:off x="3821040" y="3356280"/>
-            <a:ext cx="2354760" cy="1564920"/>
+            <a:ext cx="2354400" cy="1564560"/>
           </a:xfrm>
           <a:prstGeom prst="rect">
             <a:avLst/>
@@ -8946,7 +8878,7 @@
         <p:spPr>
           <a:xfrm>
             <a:off x="6782760" y="2571840"/>
-            <a:ext cx="2293920" cy="713520"/>
+            <a:ext cx="2293560" cy="713160"/>
           </a:xfrm>
           <a:prstGeom prst="rect">
             <a:avLst/>
@@ -9008,7 +8940,7 @@
         <p:spPr>
           <a:xfrm>
             <a:off x="6782760" y="3356280"/>
-            <a:ext cx="2293920" cy="1564920"/>
+            <a:ext cx="2293560" cy="1564560"/>
           </a:xfrm>
           <a:prstGeom prst="rect">
             <a:avLst/>
@@ -9070,7 +9002,7 @@
         <p:spPr>
           <a:xfrm>
             <a:off x="0" y="-478800"/>
-            <a:ext cx="9143280" cy="2327760"/>
+            <a:ext cx="9142920" cy="2327400"/>
           </a:xfrm>
           <a:prstGeom prst="roundRect">
             <a:avLst>
@@ -9134,7 +9066,7 @@
         <p:spPr>
           <a:xfrm>
             <a:off x="8519760" y="4831560"/>
-            <a:ext cx="484560" cy="226800"/>
+            <a:ext cx="484200" cy="226800"/>
           </a:xfrm>
           <a:prstGeom prst="rect">
             <a:avLst/>
@@ -9186,7 +9118,7 @@
         <p:spPr>
           <a:xfrm>
             <a:off x="228600" y="2057400"/>
-            <a:ext cx="8686440" cy="685440"/>
+            <a:ext cx="8686080" cy="685080"/>
           </a:xfrm>
           <a:prstGeom prst="rect">
             <a:avLst/>
@@ -9215,7 +9147,11 @@
             </a:pPr>
             <a:r>
               <a:rPr b="0" lang="en-US" sz="1800" spc="-1" strike="noStrike">
-                <a:latin typeface="Arial"/>
+                <a:solidFill>
+                  <a:srgbClr val="000000"/>
+                </a:solidFill>
+                <a:latin typeface="Arial"/>
+                <a:ea typeface="DejaVu Sans"/>
               </a:rPr>
               <a:t>TITLE</a:t>
             </a:r>
